--- a/presentation/Real-Network-Testbed-Slides.pptx
+++ b/presentation/Real-Network-Testbed-Slides.pptx
@@ -1240,7 +1240,7 @@
           <a:lstStyle/>
           <a:p>
             <a:r>
-              <a:t>This is a real decision from our test run of the lunch-hour rush: the canteen asks for double its share, office and cameras run flat out, the warehouse is busy. Demand reached 1,316 kbps on a 950 kbps link. Under the current limits the slices could carry 1,173 kbps, so 251.5 kbps had to be freed, including the 3 percent safety margin. The canteen gave up 80 percent, down to its 28 kbps minimum. Office Wi-Fi was cut to 217, the warehouse to 121, the cameras to 211. The clinic was never cut, and the factory and quality lab were untouched. Notice: the canteen’s premium URLLC label did not protect it, and the lab’s standard eMBB label did not expose it. The gateway was enforcing the new limits four seconds after the load changed.</a:t>
+              <a:t>This is a real decision from our test run of the lunch-hour rush: the canteen asks for double its share, office and cameras run flat out, the warehouse is busy. Demand reached 1,316 kbps on a 950 kbps link. Why free 251.5 and not 1,316 minus 950, which is 366? Because some demand never reaches the shared link: the canteen asks for 280 but its own limit is 140, so the extra is already dropped in its own queue, and cutting it frees nothing. Under the current limits the slices can put 1,173 kbps on the link. The engine aims 3 percent below the link, 921.5 kbps, so it does not flip-flop. 1,173 minus 921.5 is 251.5 kbps, and the cuts add up to exactly that. The canteen gave up 80 percent, down to its 28 kbps minimum. Office Wi-Fi was cut to 217, the warehouse to 121, the cameras to 211. The clinic was never cut, and the factory and quality lab were untouched. Notice: the canteen’s premium URLLC label did not protect it, and the lab’s standard eMBB label did not expose it. The gateway was enforcing the new limits four seconds after the load changed.</a:t>
             </a:r>
           </a:p>
         </p:txBody>
